--- a/RLS 2022 (new).pptx
+++ b/RLS 2022 (new).pptx
@@ -274,7 +274,7 @@
           <a:p>
             <a:fld id="{D07322C4-0FF8-4ED7-9026-3E6802F1D71E}" type="datetimeFigureOut">
               <a:rPr lang="en-GB" smtClean="0"/>
-              <a:t>13/01/2022</a:t>
+              <a:t>01/01/2025</a:t>
             </a:fld>
             <a:endParaRPr lang="en-GB"/>
           </a:p>
@@ -474,7 +474,7 @@
           <a:p>
             <a:fld id="{D07322C4-0FF8-4ED7-9026-3E6802F1D71E}" type="datetimeFigureOut">
               <a:rPr lang="en-GB" smtClean="0"/>
-              <a:t>13/01/2022</a:t>
+              <a:t>01/01/2025</a:t>
             </a:fld>
             <a:endParaRPr lang="en-GB"/>
           </a:p>
@@ -684,7 +684,7 @@
           <a:p>
             <a:fld id="{D07322C4-0FF8-4ED7-9026-3E6802F1D71E}" type="datetimeFigureOut">
               <a:rPr lang="en-GB" smtClean="0"/>
-              <a:t>13/01/2022</a:t>
+              <a:t>01/01/2025</a:t>
             </a:fld>
             <a:endParaRPr lang="en-GB"/>
           </a:p>
@@ -884,7 +884,7 @@
           <a:p>
             <a:fld id="{D07322C4-0FF8-4ED7-9026-3E6802F1D71E}" type="datetimeFigureOut">
               <a:rPr lang="en-GB" smtClean="0"/>
-              <a:t>13/01/2022</a:t>
+              <a:t>01/01/2025</a:t>
             </a:fld>
             <a:endParaRPr lang="en-GB"/>
           </a:p>
@@ -1160,7 +1160,7 @@
           <a:p>
             <a:fld id="{D07322C4-0FF8-4ED7-9026-3E6802F1D71E}" type="datetimeFigureOut">
               <a:rPr lang="en-GB" smtClean="0"/>
-              <a:t>13/01/2022</a:t>
+              <a:t>01/01/2025</a:t>
             </a:fld>
             <a:endParaRPr lang="en-GB"/>
           </a:p>
@@ -1428,7 +1428,7 @@
           <a:p>
             <a:fld id="{D07322C4-0FF8-4ED7-9026-3E6802F1D71E}" type="datetimeFigureOut">
               <a:rPr lang="en-GB" smtClean="0"/>
-              <a:t>13/01/2022</a:t>
+              <a:t>01/01/2025</a:t>
             </a:fld>
             <a:endParaRPr lang="en-GB"/>
           </a:p>
@@ -1843,7 +1843,7 @@
           <a:p>
             <a:fld id="{D07322C4-0FF8-4ED7-9026-3E6802F1D71E}" type="datetimeFigureOut">
               <a:rPr lang="en-GB" smtClean="0"/>
-              <a:t>13/01/2022</a:t>
+              <a:t>01/01/2025</a:t>
             </a:fld>
             <a:endParaRPr lang="en-GB"/>
           </a:p>
@@ -1985,7 +1985,7 @@
           <a:p>
             <a:fld id="{D07322C4-0FF8-4ED7-9026-3E6802F1D71E}" type="datetimeFigureOut">
               <a:rPr lang="en-GB" smtClean="0"/>
-              <a:t>13/01/2022</a:t>
+              <a:t>01/01/2025</a:t>
             </a:fld>
             <a:endParaRPr lang="en-GB"/>
           </a:p>
@@ -2098,7 +2098,7 @@
           <a:p>
             <a:fld id="{D07322C4-0FF8-4ED7-9026-3E6802F1D71E}" type="datetimeFigureOut">
               <a:rPr lang="en-GB" smtClean="0"/>
-              <a:t>13/01/2022</a:t>
+              <a:t>01/01/2025</a:t>
             </a:fld>
             <a:endParaRPr lang="en-GB"/>
           </a:p>
@@ -2411,7 +2411,7 @@
           <a:p>
             <a:fld id="{D07322C4-0FF8-4ED7-9026-3E6802F1D71E}" type="datetimeFigureOut">
               <a:rPr lang="en-GB" smtClean="0"/>
-              <a:t>13/01/2022</a:t>
+              <a:t>01/01/2025</a:t>
             </a:fld>
             <a:endParaRPr lang="en-GB"/>
           </a:p>
@@ -2700,7 +2700,7 @@
           <a:p>
             <a:fld id="{D07322C4-0FF8-4ED7-9026-3E6802F1D71E}" type="datetimeFigureOut">
               <a:rPr lang="en-GB" smtClean="0"/>
-              <a:t>13/01/2022</a:t>
+              <a:t>01/01/2025</a:t>
             </a:fld>
             <a:endParaRPr lang="en-GB"/>
           </a:p>
@@ -2943,7 +2943,7 @@
           <a:p>
             <a:fld id="{D07322C4-0FF8-4ED7-9026-3E6802F1D71E}" type="datetimeFigureOut">
               <a:rPr lang="en-GB" smtClean="0"/>
-              <a:t>13/01/2022</a:t>
+              <a:t>01/01/2025</a:t>
             </a:fld>
             <a:endParaRPr lang="en-GB"/>
           </a:p>
@@ -7492,7 +7492,7 @@
         </p:nvSpPr>
         <p:spPr>
           <a:xfrm>
-            <a:off x="838200" y="4270825"/>
+            <a:off x="838200" y="4250673"/>
             <a:ext cx="10515600" cy="4351338"/>
           </a:xfrm>
           <a:prstGeom prst="rect">
@@ -20092,7 +20092,7 @@
             </a:r>
             <a:r>
               <a:rPr lang="en-GB" sz="2400" dirty="0"/>
-              <a:t>	T’</a:t>
+              <a:t>		T’</a:t>
             </a:r>
           </a:p>
           <a:p>
@@ -20436,6 +20436,886 @@
           </a:p>
         </p:txBody>
       </p:sp>
+      <p:cxnSp>
+        <p:nvCxnSpPr>
+          <p:cNvPr id="7" name="Straight Connector 6">
+            <a:extLst>
+              <a:ext uri="{FF2B5EF4-FFF2-40B4-BE49-F238E27FC236}">
+                <a16:creationId xmlns:a16="http://schemas.microsoft.com/office/drawing/2014/main" id="{A4BD94B0-314A-91C0-6D93-BDC2BAB9EC0B}"/>
+              </a:ext>
+            </a:extLst>
+          </p:cNvPr>
+          <p:cNvCxnSpPr>
+            <a:cxnSpLocks/>
+          </p:cNvCxnSpPr>
+          <p:nvPr/>
+        </p:nvCxnSpPr>
+        <p:spPr>
+          <a:xfrm flipH="1">
+            <a:off x="648393" y="1812175"/>
+            <a:ext cx="598516" cy="166254"/>
+          </a:xfrm>
+          <a:prstGeom prst="line">
+            <a:avLst/>
+          </a:prstGeom>
+        </p:spPr>
+        <p:style>
+          <a:lnRef idx="1">
+            <a:schemeClr val="dk1"/>
+          </a:lnRef>
+          <a:fillRef idx="0">
+            <a:schemeClr val="dk1"/>
+          </a:fillRef>
+          <a:effectRef idx="0">
+            <a:schemeClr val="dk1"/>
+          </a:effectRef>
+          <a:fontRef idx="minor">
+            <a:schemeClr val="tx1"/>
+          </a:fontRef>
+        </p:style>
+      </p:cxnSp>
+      <p:cxnSp>
+        <p:nvCxnSpPr>
+          <p:cNvPr id="12" name="Straight Connector 11">
+            <a:extLst>
+              <a:ext uri="{FF2B5EF4-FFF2-40B4-BE49-F238E27FC236}">
+                <a16:creationId xmlns:a16="http://schemas.microsoft.com/office/drawing/2014/main" id="{A5FCCC3E-CC9B-B163-CF13-8C663E8D9B6B}"/>
+              </a:ext>
+            </a:extLst>
+          </p:cNvPr>
+          <p:cNvCxnSpPr>
+            <a:cxnSpLocks/>
+          </p:cNvCxnSpPr>
+          <p:nvPr/>
+        </p:nvCxnSpPr>
+        <p:spPr>
+          <a:xfrm>
+            <a:off x="1246909" y="1812175"/>
+            <a:ext cx="869758" cy="133003"/>
+          </a:xfrm>
+          <a:prstGeom prst="line">
+            <a:avLst/>
+          </a:prstGeom>
+        </p:spPr>
+        <p:style>
+          <a:lnRef idx="1">
+            <a:schemeClr val="dk1"/>
+          </a:lnRef>
+          <a:fillRef idx="0">
+            <a:schemeClr val="dk1"/>
+          </a:fillRef>
+          <a:effectRef idx="0">
+            <a:schemeClr val="dk1"/>
+          </a:effectRef>
+          <a:fontRef idx="minor">
+            <a:schemeClr val="tx1"/>
+          </a:fontRef>
+        </p:style>
+      </p:cxnSp>
+      <p:cxnSp>
+        <p:nvCxnSpPr>
+          <p:cNvPr id="14" name="Straight Connector 13">
+            <a:extLst>
+              <a:ext uri="{FF2B5EF4-FFF2-40B4-BE49-F238E27FC236}">
+                <a16:creationId xmlns:a16="http://schemas.microsoft.com/office/drawing/2014/main" id="{9A75852E-F395-385A-EE67-C9A866A18F63}"/>
+              </a:ext>
+            </a:extLst>
+          </p:cNvPr>
+          <p:cNvCxnSpPr/>
+          <p:nvPr/>
+        </p:nvCxnSpPr>
+        <p:spPr>
+          <a:xfrm flipH="1">
+            <a:off x="1246909" y="2220463"/>
+            <a:ext cx="869758" cy="190228"/>
+          </a:xfrm>
+          <a:prstGeom prst="line">
+            <a:avLst/>
+          </a:prstGeom>
+        </p:spPr>
+        <p:style>
+          <a:lnRef idx="1">
+            <a:schemeClr val="dk1"/>
+          </a:lnRef>
+          <a:fillRef idx="0">
+            <a:schemeClr val="dk1"/>
+          </a:fillRef>
+          <a:effectRef idx="0">
+            <a:schemeClr val="dk1"/>
+          </a:effectRef>
+          <a:fontRef idx="minor">
+            <a:schemeClr val="tx1"/>
+          </a:fontRef>
+        </p:style>
+      </p:cxnSp>
+      <p:cxnSp>
+        <p:nvCxnSpPr>
+          <p:cNvPr id="16" name="Straight Connector 15">
+            <a:extLst>
+              <a:ext uri="{FF2B5EF4-FFF2-40B4-BE49-F238E27FC236}">
+                <a16:creationId xmlns:a16="http://schemas.microsoft.com/office/drawing/2014/main" id="{A2C5BFD3-06E6-22EC-2CAC-84017A15D459}"/>
+              </a:ext>
+            </a:extLst>
+          </p:cNvPr>
+          <p:cNvCxnSpPr/>
+          <p:nvPr/>
+        </p:nvCxnSpPr>
+        <p:spPr>
+          <a:xfrm>
+            <a:off x="2116667" y="2220463"/>
+            <a:ext cx="875915" cy="156977"/>
+          </a:xfrm>
+          <a:prstGeom prst="line">
+            <a:avLst/>
+          </a:prstGeom>
+        </p:spPr>
+        <p:style>
+          <a:lnRef idx="1">
+            <a:schemeClr val="dk1"/>
+          </a:lnRef>
+          <a:fillRef idx="0">
+            <a:schemeClr val="dk1"/>
+          </a:fillRef>
+          <a:effectRef idx="0">
+            <a:schemeClr val="dk1"/>
+          </a:effectRef>
+          <a:fontRef idx="minor">
+            <a:schemeClr val="tx1"/>
+          </a:fontRef>
+        </p:style>
+      </p:cxnSp>
+      <p:cxnSp>
+        <p:nvCxnSpPr>
+          <p:cNvPr id="18" name="Straight Connector 17">
+            <a:extLst>
+              <a:ext uri="{FF2B5EF4-FFF2-40B4-BE49-F238E27FC236}">
+                <a16:creationId xmlns:a16="http://schemas.microsoft.com/office/drawing/2014/main" id="{82403471-18C1-6C5A-FCF8-CA9861292266}"/>
+              </a:ext>
+            </a:extLst>
+          </p:cNvPr>
+          <p:cNvCxnSpPr/>
+          <p:nvPr/>
+        </p:nvCxnSpPr>
+        <p:spPr>
+          <a:xfrm flipH="1">
+            <a:off x="2510444" y="2617164"/>
+            <a:ext cx="482138" cy="158753"/>
+          </a:xfrm>
+          <a:prstGeom prst="line">
+            <a:avLst/>
+          </a:prstGeom>
+        </p:spPr>
+        <p:style>
+          <a:lnRef idx="1">
+            <a:schemeClr val="dk1"/>
+          </a:lnRef>
+          <a:fillRef idx="0">
+            <a:schemeClr val="dk1"/>
+          </a:fillRef>
+          <a:effectRef idx="0">
+            <a:schemeClr val="dk1"/>
+          </a:effectRef>
+          <a:fontRef idx="minor">
+            <a:schemeClr val="tx1"/>
+          </a:fontRef>
+        </p:style>
+      </p:cxnSp>
+      <p:cxnSp>
+        <p:nvCxnSpPr>
+          <p:cNvPr id="20" name="Straight Connector 19">
+            <a:extLst>
+              <a:ext uri="{FF2B5EF4-FFF2-40B4-BE49-F238E27FC236}">
+                <a16:creationId xmlns:a16="http://schemas.microsoft.com/office/drawing/2014/main" id="{6596544D-74FE-29F3-6A4D-B6C4A3C5472C}"/>
+              </a:ext>
+            </a:extLst>
+          </p:cNvPr>
+          <p:cNvCxnSpPr/>
+          <p:nvPr/>
+        </p:nvCxnSpPr>
+        <p:spPr>
+          <a:xfrm>
+            <a:off x="2959331" y="2613414"/>
+            <a:ext cx="798022" cy="158753"/>
+          </a:xfrm>
+          <a:prstGeom prst="line">
+            <a:avLst/>
+          </a:prstGeom>
+        </p:spPr>
+        <p:style>
+          <a:lnRef idx="1">
+            <a:schemeClr val="dk1"/>
+          </a:lnRef>
+          <a:fillRef idx="0">
+            <a:schemeClr val="dk1"/>
+          </a:fillRef>
+          <a:effectRef idx="0">
+            <a:schemeClr val="dk1"/>
+          </a:effectRef>
+          <a:fontRef idx="minor">
+            <a:schemeClr val="tx1"/>
+          </a:fontRef>
+        </p:style>
+      </p:cxnSp>
+      <p:cxnSp>
+        <p:nvCxnSpPr>
+          <p:cNvPr id="22" name="Straight Connector 21">
+            <a:extLst>
+              <a:ext uri="{FF2B5EF4-FFF2-40B4-BE49-F238E27FC236}">
+                <a16:creationId xmlns:a16="http://schemas.microsoft.com/office/drawing/2014/main" id="{5EBD7026-A0B0-9461-9E9F-6FDD26870E40}"/>
+              </a:ext>
+            </a:extLst>
+          </p:cNvPr>
+          <p:cNvCxnSpPr>
+            <a:cxnSpLocks/>
+          </p:cNvCxnSpPr>
+          <p:nvPr/>
+        </p:nvCxnSpPr>
+        <p:spPr>
+          <a:xfrm flipH="1">
+            <a:off x="2959331" y="3075709"/>
+            <a:ext cx="798022" cy="116378"/>
+          </a:xfrm>
+          <a:prstGeom prst="line">
+            <a:avLst/>
+          </a:prstGeom>
+        </p:spPr>
+        <p:style>
+          <a:lnRef idx="1">
+            <a:schemeClr val="dk1"/>
+          </a:lnRef>
+          <a:fillRef idx="0">
+            <a:schemeClr val="dk1"/>
+          </a:fillRef>
+          <a:effectRef idx="0">
+            <a:schemeClr val="dk1"/>
+          </a:effectRef>
+          <a:fontRef idx="minor">
+            <a:schemeClr val="tx1"/>
+          </a:fontRef>
+        </p:style>
+      </p:cxnSp>
+      <p:cxnSp>
+        <p:nvCxnSpPr>
+          <p:cNvPr id="24" name="Straight Connector 23">
+            <a:extLst>
+              <a:ext uri="{FF2B5EF4-FFF2-40B4-BE49-F238E27FC236}">
+                <a16:creationId xmlns:a16="http://schemas.microsoft.com/office/drawing/2014/main" id="{457D02AD-9906-D523-03BB-7BED7BA45E9F}"/>
+              </a:ext>
+            </a:extLst>
+          </p:cNvPr>
+          <p:cNvCxnSpPr>
+            <a:cxnSpLocks/>
+          </p:cNvCxnSpPr>
+          <p:nvPr/>
+        </p:nvCxnSpPr>
+        <p:spPr>
+          <a:xfrm>
+            <a:off x="3757353" y="3075709"/>
+            <a:ext cx="1230283" cy="116378"/>
+          </a:xfrm>
+          <a:prstGeom prst="line">
+            <a:avLst/>
+          </a:prstGeom>
+        </p:spPr>
+        <p:style>
+          <a:lnRef idx="1">
+            <a:schemeClr val="dk1"/>
+          </a:lnRef>
+          <a:fillRef idx="0">
+            <a:schemeClr val="dk1"/>
+          </a:fillRef>
+          <a:effectRef idx="0">
+            <a:schemeClr val="dk1"/>
+          </a:effectRef>
+          <a:fontRef idx="minor">
+            <a:schemeClr val="tx1"/>
+          </a:fontRef>
+        </p:style>
+      </p:cxnSp>
+      <p:cxnSp>
+        <p:nvCxnSpPr>
+          <p:cNvPr id="26" name="Straight Connector 25">
+            <a:extLst>
+              <a:ext uri="{FF2B5EF4-FFF2-40B4-BE49-F238E27FC236}">
+                <a16:creationId xmlns:a16="http://schemas.microsoft.com/office/drawing/2014/main" id="{18DB8B09-5DCC-F213-1FAA-07DD968867D9}"/>
+              </a:ext>
+            </a:extLst>
+          </p:cNvPr>
+          <p:cNvCxnSpPr>
+            <a:cxnSpLocks/>
+          </p:cNvCxnSpPr>
+          <p:nvPr/>
+        </p:nvCxnSpPr>
+        <p:spPr>
+          <a:xfrm flipH="1">
+            <a:off x="4455622" y="3455585"/>
+            <a:ext cx="532014" cy="210329"/>
+          </a:xfrm>
+          <a:prstGeom prst="line">
+            <a:avLst/>
+          </a:prstGeom>
+        </p:spPr>
+        <p:style>
+          <a:lnRef idx="1">
+            <a:schemeClr val="dk1"/>
+          </a:lnRef>
+          <a:fillRef idx="0">
+            <a:schemeClr val="dk1"/>
+          </a:fillRef>
+          <a:effectRef idx="0">
+            <a:schemeClr val="dk1"/>
+          </a:effectRef>
+          <a:fontRef idx="minor">
+            <a:schemeClr val="tx1"/>
+          </a:fontRef>
+        </p:style>
+      </p:cxnSp>
+      <p:cxnSp>
+        <p:nvCxnSpPr>
+          <p:cNvPr id="28" name="Straight Connector 27">
+            <a:extLst>
+              <a:ext uri="{FF2B5EF4-FFF2-40B4-BE49-F238E27FC236}">
+                <a16:creationId xmlns:a16="http://schemas.microsoft.com/office/drawing/2014/main" id="{EA605EC8-06E6-5917-E16F-04A7DE464C65}"/>
+              </a:ext>
+            </a:extLst>
+          </p:cNvPr>
+          <p:cNvCxnSpPr/>
+          <p:nvPr/>
+        </p:nvCxnSpPr>
+        <p:spPr>
+          <a:xfrm>
+            <a:off x="4987636" y="3429000"/>
+            <a:ext cx="814648" cy="236914"/>
+          </a:xfrm>
+          <a:prstGeom prst="line">
+            <a:avLst/>
+          </a:prstGeom>
+        </p:spPr>
+        <p:style>
+          <a:lnRef idx="1">
+            <a:schemeClr val="dk1"/>
+          </a:lnRef>
+          <a:fillRef idx="0">
+            <a:schemeClr val="dk1"/>
+          </a:fillRef>
+          <a:effectRef idx="0">
+            <a:schemeClr val="dk1"/>
+          </a:effectRef>
+          <a:fontRef idx="minor">
+            <a:schemeClr val="tx1"/>
+          </a:fontRef>
+        </p:style>
+      </p:cxnSp>
+      <p:cxnSp>
+        <p:nvCxnSpPr>
+          <p:cNvPr id="30" name="Straight Connector 29">
+            <a:extLst>
+              <a:ext uri="{FF2B5EF4-FFF2-40B4-BE49-F238E27FC236}">
+                <a16:creationId xmlns:a16="http://schemas.microsoft.com/office/drawing/2014/main" id="{2F0A90A5-648B-83A0-6FFB-BCE95BC9BA4E}"/>
+              </a:ext>
+            </a:extLst>
+          </p:cNvPr>
+          <p:cNvCxnSpPr/>
+          <p:nvPr/>
+        </p:nvCxnSpPr>
+        <p:spPr>
+          <a:xfrm flipH="1">
+            <a:off x="4987636" y="3823855"/>
+            <a:ext cx="659633" cy="232756"/>
+          </a:xfrm>
+          <a:prstGeom prst="line">
+            <a:avLst/>
+          </a:prstGeom>
+        </p:spPr>
+        <p:style>
+          <a:lnRef idx="1">
+            <a:schemeClr val="dk1"/>
+          </a:lnRef>
+          <a:fillRef idx="0">
+            <a:schemeClr val="dk1"/>
+          </a:fillRef>
+          <a:effectRef idx="0">
+            <a:schemeClr val="dk1"/>
+          </a:effectRef>
+          <a:fontRef idx="minor">
+            <a:schemeClr val="tx1"/>
+          </a:fontRef>
+        </p:style>
+      </p:cxnSp>
+      <p:cxnSp>
+        <p:nvCxnSpPr>
+          <p:cNvPr id="32" name="Straight Connector 31">
+            <a:extLst>
+              <a:ext uri="{FF2B5EF4-FFF2-40B4-BE49-F238E27FC236}">
+                <a16:creationId xmlns:a16="http://schemas.microsoft.com/office/drawing/2014/main" id="{631A674E-F8B4-F0C8-D814-636379A34CC2}"/>
+              </a:ext>
+            </a:extLst>
+          </p:cNvPr>
+          <p:cNvCxnSpPr/>
+          <p:nvPr/>
+        </p:nvCxnSpPr>
+        <p:spPr>
+          <a:xfrm>
+            <a:off x="5647269" y="3823855"/>
+            <a:ext cx="1086040" cy="249381"/>
+          </a:xfrm>
+          <a:prstGeom prst="line">
+            <a:avLst/>
+          </a:prstGeom>
+        </p:spPr>
+        <p:style>
+          <a:lnRef idx="1">
+            <a:schemeClr val="dk1"/>
+          </a:lnRef>
+          <a:fillRef idx="0">
+            <a:schemeClr val="dk1"/>
+          </a:fillRef>
+          <a:effectRef idx="0">
+            <a:schemeClr val="dk1"/>
+          </a:effectRef>
+          <a:fontRef idx="minor">
+            <a:schemeClr val="tx1"/>
+          </a:fontRef>
+        </p:style>
+      </p:cxnSp>
+      <p:cxnSp>
+        <p:nvCxnSpPr>
+          <p:cNvPr id="34" name="Straight Connector 33">
+            <a:extLst>
+              <a:ext uri="{FF2B5EF4-FFF2-40B4-BE49-F238E27FC236}">
+                <a16:creationId xmlns:a16="http://schemas.microsoft.com/office/drawing/2014/main" id="{C68D26D3-9EAF-EF4F-7AB6-95732B0EF985}"/>
+              </a:ext>
+            </a:extLst>
+          </p:cNvPr>
+          <p:cNvCxnSpPr>
+            <a:cxnSpLocks/>
+          </p:cNvCxnSpPr>
+          <p:nvPr/>
+        </p:nvCxnSpPr>
+        <p:spPr>
+          <a:xfrm flipH="1">
+            <a:off x="6096000" y="4371962"/>
+            <a:ext cx="637309" cy="133536"/>
+          </a:xfrm>
+          <a:prstGeom prst="line">
+            <a:avLst/>
+          </a:prstGeom>
+        </p:spPr>
+        <p:style>
+          <a:lnRef idx="1">
+            <a:schemeClr val="dk1"/>
+          </a:lnRef>
+          <a:fillRef idx="0">
+            <a:schemeClr val="dk1"/>
+          </a:fillRef>
+          <a:effectRef idx="0">
+            <a:schemeClr val="dk1"/>
+          </a:effectRef>
+          <a:fontRef idx="minor">
+            <a:schemeClr val="tx1"/>
+          </a:fontRef>
+        </p:style>
+      </p:cxnSp>
+      <p:cxnSp>
+        <p:nvCxnSpPr>
+          <p:cNvPr id="37" name="Straight Connector 36">
+            <a:extLst>
+              <a:ext uri="{FF2B5EF4-FFF2-40B4-BE49-F238E27FC236}">
+                <a16:creationId xmlns:a16="http://schemas.microsoft.com/office/drawing/2014/main" id="{FD0F8A13-2B9E-F891-37A6-670A2A6A9D57}"/>
+              </a:ext>
+            </a:extLst>
+          </p:cNvPr>
+          <p:cNvCxnSpPr/>
+          <p:nvPr/>
+        </p:nvCxnSpPr>
+        <p:spPr>
+          <a:xfrm>
+            <a:off x="6705603" y="4371962"/>
+            <a:ext cx="858979" cy="116911"/>
+          </a:xfrm>
+          <a:prstGeom prst="line">
+            <a:avLst/>
+          </a:prstGeom>
+        </p:spPr>
+        <p:style>
+          <a:lnRef idx="1">
+            <a:schemeClr val="dk1"/>
+          </a:lnRef>
+          <a:fillRef idx="0">
+            <a:schemeClr val="dk1"/>
+          </a:fillRef>
+          <a:effectRef idx="0">
+            <a:schemeClr val="dk1"/>
+          </a:effectRef>
+          <a:fontRef idx="minor">
+            <a:schemeClr val="tx1"/>
+          </a:fontRef>
+        </p:style>
+      </p:cxnSp>
+      <p:cxnSp>
+        <p:nvCxnSpPr>
+          <p:cNvPr id="39" name="Straight Connector 38">
+            <a:extLst>
+              <a:ext uri="{FF2B5EF4-FFF2-40B4-BE49-F238E27FC236}">
+                <a16:creationId xmlns:a16="http://schemas.microsoft.com/office/drawing/2014/main" id="{50389975-43AF-9357-3FFD-620A5DD1FB89}"/>
+              </a:ext>
+            </a:extLst>
+          </p:cNvPr>
+          <p:cNvCxnSpPr/>
+          <p:nvPr/>
+        </p:nvCxnSpPr>
+        <p:spPr>
+          <a:xfrm flipH="1">
+            <a:off x="6733309" y="4720097"/>
+            <a:ext cx="864524" cy="184412"/>
+          </a:xfrm>
+          <a:prstGeom prst="line">
+            <a:avLst/>
+          </a:prstGeom>
+        </p:spPr>
+        <p:style>
+          <a:lnRef idx="1">
+            <a:schemeClr val="dk1"/>
+          </a:lnRef>
+          <a:fillRef idx="0">
+            <a:schemeClr val="dk1"/>
+          </a:fillRef>
+          <a:effectRef idx="0">
+            <a:schemeClr val="dk1"/>
+          </a:effectRef>
+          <a:fontRef idx="minor">
+            <a:schemeClr val="tx1"/>
+          </a:fontRef>
+        </p:style>
+      </p:cxnSp>
+      <p:cxnSp>
+        <p:nvCxnSpPr>
+          <p:cNvPr id="41" name="Straight Connector 40">
+            <a:extLst>
+              <a:ext uri="{FF2B5EF4-FFF2-40B4-BE49-F238E27FC236}">
+                <a16:creationId xmlns:a16="http://schemas.microsoft.com/office/drawing/2014/main" id="{6AF5CDD6-933F-A234-F978-66D2435AC8CD}"/>
+              </a:ext>
+            </a:extLst>
+          </p:cNvPr>
+          <p:cNvCxnSpPr/>
+          <p:nvPr/>
+        </p:nvCxnSpPr>
+        <p:spPr>
+          <a:xfrm>
+            <a:off x="7564582" y="4720097"/>
+            <a:ext cx="831273" cy="151161"/>
+          </a:xfrm>
+          <a:prstGeom prst="line">
+            <a:avLst/>
+          </a:prstGeom>
+        </p:spPr>
+        <p:style>
+          <a:lnRef idx="1">
+            <a:schemeClr val="dk1"/>
+          </a:lnRef>
+          <a:fillRef idx="0">
+            <a:schemeClr val="dk1"/>
+          </a:fillRef>
+          <a:effectRef idx="0">
+            <a:schemeClr val="dk1"/>
+          </a:effectRef>
+          <a:fontRef idx="minor">
+            <a:schemeClr val="tx1"/>
+          </a:fontRef>
+        </p:style>
+      </p:cxnSp>
+      <p:cxnSp>
+        <p:nvCxnSpPr>
+          <p:cNvPr id="43" name="Straight Connector 42">
+            <a:extLst>
+              <a:ext uri="{FF2B5EF4-FFF2-40B4-BE49-F238E27FC236}">
+                <a16:creationId xmlns:a16="http://schemas.microsoft.com/office/drawing/2014/main" id="{6E9865F7-DC8B-58B6-A7BC-B9323BFC1D32}"/>
+              </a:ext>
+            </a:extLst>
+          </p:cNvPr>
+          <p:cNvCxnSpPr/>
+          <p:nvPr/>
+        </p:nvCxnSpPr>
+        <p:spPr>
+          <a:xfrm flipH="1">
+            <a:off x="7897091" y="5181762"/>
+            <a:ext cx="565265" cy="186106"/>
+          </a:xfrm>
+          <a:prstGeom prst="line">
+            <a:avLst/>
+          </a:prstGeom>
+        </p:spPr>
+        <p:style>
+          <a:lnRef idx="1">
+            <a:schemeClr val="dk1"/>
+          </a:lnRef>
+          <a:fillRef idx="0">
+            <a:schemeClr val="dk1"/>
+          </a:fillRef>
+          <a:effectRef idx="0">
+            <a:schemeClr val="dk1"/>
+          </a:effectRef>
+          <a:fontRef idx="minor">
+            <a:schemeClr val="tx1"/>
+          </a:fontRef>
+        </p:style>
+      </p:cxnSp>
+      <p:cxnSp>
+        <p:nvCxnSpPr>
+          <p:cNvPr id="45" name="Straight Connector 44">
+            <a:extLst>
+              <a:ext uri="{FF2B5EF4-FFF2-40B4-BE49-F238E27FC236}">
+                <a16:creationId xmlns:a16="http://schemas.microsoft.com/office/drawing/2014/main" id="{7A13B0A7-FD53-8C3C-4015-CB16717E6B7F}"/>
+              </a:ext>
+            </a:extLst>
+          </p:cNvPr>
+          <p:cNvCxnSpPr/>
+          <p:nvPr/>
+        </p:nvCxnSpPr>
+        <p:spPr>
+          <a:xfrm>
+            <a:off x="8395855" y="5181762"/>
+            <a:ext cx="897774" cy="186106"/>
+          </a:xfrm>
+          <a:prstGeom prst="line">
+            <a:avLst/>
+          </a:prstGeom>
+        </p:spPr>
+        <p:style>
+          <a:lnRef idx="1">
+            <a:schemeClr val="dk1"/>
+          </a:lnRef>
+          <a:fillRef idx="0">
+            <a:schemeClr val="dk1"/>
+          </a:fillRef>
+          <a:effectRef idx="0">
+            <a:schemeClr val="dk1"/>
+          </a:effectRef>
+          <a:fontRef idx="minor">
+            <a:schemeClr val="tx1"/>
+          </a:fontRef>
+        </p:style>
+      </p:cxnSp>
+      <p:cxnSp>
+        <p:nvCxnSpPr>
+          <p:cNvPr id="47" name="Straight Connector 46">
+            <a:extLst>
+              <a:ext uri="{FF2B5EF4-FFF2-40B4-BE49-F238E27FC236}">
+                <a16:creationId xmlns:a16="http://schemas.microsoft.com/office/drawing/2014/main" id="{440CABE6-0F57-D0EB-70F9-D274A5AF7096}"/>
+              </a:ext>
+            </a:extLst>
+          </p:cNvPr>
+          <p:cNvCxnSpPr/>
+          <p:nvPr/>
+        </p:nvCxnSpPr>
+        <p:spPr>
+          <a:xfrm flipH="1">
+            <a:off x="8395855" y="5519651"/>
+            <a:ext cx="914400" cy="133004"/>
+          </a:xfrm>
+          <a:prstGeom prst="line">
+            <a:avLst/>
+          </a:prstGeom>
+        </p:spPr>
+        <p:style>
+          <a:lnRef idx="1">
+            <a:schemeClr val="dk1"/>
+          </a:lnRef>
+          <a:fillRef idx="0">
+            <a:schemeClr val="dk1"/>
+          </a:fillRef>
+          <a:effectRef idx="0">
+            <a:schemeClr val="dk1"/>
+          </a:effectRef>
+          <a:fontRef idx="minor">
+            <a:schemeClr val="tx1"/>
+          </a:fontRef>
+        </p:style>
+      </p:cxnSp>
+      <p:cxnSp>
+        <p:nvCxnSpPr>
+          <p:cNvPr id="49" name="Straight Connector 48">
+            <a:extLst>
+              <a:ext uri="{FF2B5EF4-FFF2-40B4-BE49-F238E27FC236}">
+                <a16:creationId xmlns:a16="http://schemas.microsoft.com/office/drawing/2014/main" id="{74AE6FAE-4EAD-EB42-029F-387FD148B698}"/>
+              </a:ext>
+            </a:extLst>
+          </p:cNvPr>
+          <p:cNvCxnSpPr/>
+          <p:nvPr/>
+        </p:nvCxnSpPr>
+        <p:spPr>
+          <a:xfrm>
+            <a:off x="9293629" y="5519651"/>
+            <a:ext cx="964276" cy="133004"/>
+          </a:xfrm>
+          <a:prstGeom prst="line">
+            <a:avLst/>
+          </a:prstGeom>
+        </p:spPr>
+        <p:style>
+          <a:lnRef idx="1">
+            <a:schemeClr val="dk1"/>
+          </a:lnRef>
+          <a:fillRef idx="0">
+            <a:schemeClr val="dk1"/>
+          </a:fillRef>
+          <a:effectRef idx="0">
+            <a:schemeClr val="dk1"/>
+          </a:effectRef>
+          <a:fontRef idx="minor">
+            <a:schemeClr val="tx1"/>
+          </a:fontRef>
+        </p:style>
+      </p:cxnSp>
+      <p:cxnSp>
+        <p:nvCxnSpPr>
+          <p:cNvPr id="51" name="Straight Connector 50">
+            <a:extLst>
+              <a:ext uri="{FF2B5EF4-FFF2-40B4-BE49-F238E27FC236}">
+                <a16:creationId xmlns:a16="http://schemas.microsoft.com/office/drawing/2014/main" id="{49EC8CD7-5E56-C800-8C2B-CB642DD36A07}"/>
+              </a:ext>
+            </a:extLst>
+          </p:cNvPr>
+          <p:cNvCxnSpPr>
+            <a:cxnSpLocks/>
+          </p:cNvCxnSpPr>
+          <p:nvPr/>
+        </p:nvCxnSpPr>
+        <p:spPr>
+          <a:xfrm flipH="1">
+            <a:off x="9642764" y="5839267"/>
+            <a:ext cx="648392" cy="188309"/>
+          </a:xfrm>
+          <a:prstGeom prst="line">
+            <a:avLst/>
+          </a:prstGeom>
+        </p:spPr>
+        <p:style>
+          <a:lnRef idx="1">
+            <a:schemeClr val="dk1"/>
+          </a:lnRef>
+          <a:fillRef idx="0">
+            <a:schemeClr val="dk1"/>
+          </a:fillRef>
+          <a:effectRef idx="0">
+            <a:schemeClr val="dk1"/>
+          </a:effectRef>
+          <a:fontRef idx="minor">
+            <a:schemeClr val="tx1"/>
+          </a:fontRef>
+        </p:style>
+      </p:cxnSp>
+      <p:cxnSp>
+        <p:nvCxnSpPr>
+          <p:cNvPr id="54" name="Straight Connector 53">
+            <a:extLst>
+              <a:ext uri="{FF2B5EF4-FFF2-40B4-BE49-F238E27FC236}">
+                <a16:creationId xmlns:a16="http://schemas.microsoft.com/office/drawing/2014/main" id="{26ADA275-7248-FA66-1914-FF0AA0B063E7}"/>
+              </a:ext>
+            </a:extLst>
+          </p:cNvPr>
+          <p:cNvCxnSpPr>
+            <a:cxnSpLocks/>
+          </p:cNvCxnSpPr>
+          <p:nvPr/>
+        </p:nvCxnSpPr>
+        <p:spPr>
+          <a:xfrm>
+            <a:off x="10291156" y="5841470"/>
+            <a:ext cx="864524" cy="186106"/>
+          </a:xfrm>
+          <a:prstGeom prst="line">
+            <a:avLst/>
+          </a:prstGeom>
+        </p:spPr>
+        <p:style>
+          <a:lnRef idx="1">
+            <a:schemeClr val="dk1"/>
+          </a:lnRef>
+          <a:fillRef idx="0">
+            <a:schemeClr val="dk1"/>
+          </a:fillRef>
+          <a:effectRef idx="0">
+            <a:schemeClr val="dk1"/>
+          </a:effectRef>
+          <a:fontRef idx="minor">
+            <a:schemeClr val="tx1"/>
+          </a:fontRef>
+        </p:style>
+      </p:cxnSp>
+      <p:cxnSp>
+        <p:nvCxnSpPr>
+          <p:cNvPr id="56" name="Straight Connector 55">
+            <a:extLst>
+              <a:ext uri="{FF2B5EF4-FFF2-40B4-BE49-F238E27FC236}">
+                <a16:creationId xmlns:a16="http://schemas.microsoft.com/office/drawing/2014/main" id="{E915972C-F10B-8ABD-4E72-39880EDA74CA}"/>
+              </a:ext>
+            </a:extLst>
+          </p:cNvPr>
+          <p:cNvCxnSpPr/>
+          <p:nvPr/>
+        </p:nvCxnSpPr>
+        <p:spPr>
+          <a:xfrm flipH="1">
+            <a:off x="10257905" y="6251171"/>
+            <a:ext cx="881150" cy="182880"/>
+          </a:xfrm>
+          <a:prstGeom prst="line">
+            <a:avLst/>
+          </a:prstGeom>
+        </p:spPr>
+        <p:style>
+          <a:lnRef idx="1">
+            <a:schemeClr val="dk1"/>
+          </a:lnRef>
+          <a:fillRef idx="0">
+            <a:schemeClr val="dk1"/>
+          </a:fillRef>
+          <a:effectRef idx="0">
+            <a:schemeClr val="dk1"/>
+          </a:effectRef>
+          <a:fontRef idx="minor">
+            <a:schemeClr val="tx1"/>
+          </a:fontRef>
+        </p:style>
+      </p:cxnSp>
+      <p:cxnSp>
+        <p:nvCxnSpPr>
+          <p:cNvPr id="58" name="Straight Connector 57">
+            <a:extLst>
+              <a:ext uri="{FF2B5EF4-FFF2-40B4-BE49-F238E27FC236}">
+                <a16:creationId xmlns:a16="http://schemas.microsoft.com/office/drawing/2014/main" id="{50115E23-0F08-4932-A2BA-302DC7320020}"/>
+              </a:ext>
+            </a:extLst>
+          </p:cNvPr>
+          <p:cNvCxnSpPr/>
+          <p:nvPr/>
+        </p:nvCxnSpPr>
+        <p:spPr>
+          <a:xfrm>
+            <a:off x="11122429" y="6267796"/>
+            <a:ext cx="698269" cy="182880"/>
+          </a:xfrm>
+          <a:prstGeom prst="line">
+            <a:avLst/>
+          </a:prstGeom>
+        </p:spPr>
+        <p:style>
+          <a:lnRef idx="1">
+            <a:schemeClr val="dk1"/>
+          </a:lnRef>
+          <a:fillRef idx="0">
+            <a:schemeClr val="dk1"/>
+          </a:fillRef>
+          <a:effectRef idx="0">
+            <a:schemeClr val="dk1"/>
+          </a:effectRef>
+          <a:fontRef idx="minor">
+            <a:schemeClr val="tx1"/>
+          </a:fontRef>
+        </p:style>
+      </p:cxnSp>
     </p:spTree>
     <p:extLst>
       <p:ext uri="{BB962C8B-B14F-4D97-AF65-F5344CB8AC3E}">
@@ -21203,7 +22083,7 @@
             </a:pPr>
             <a:r>
               <a:rPr lang="en-GB" sz="2400" dirty="0" err="1"/>
-              <a:t>SpecV</a:t>
+              <a:t>SpecVP</a:t>
             </a:r>
             <a:r>
               <a:rPr lang="en-GB" sz="2400" dirty="0"/>
@@ -21318,7 +22198,7 @@
             </a:r>
             <a:r>
               <a:rPr lang="en-US" sz="2400" dirty="0" err="1"/>
-              <a:t>vP</a:t>
+              <a:t>nP</a:t>
             </a:r>
             <a:endParaRPr lang="en-US" sz="2400" dirty="0"/>
           </a:p>
@@ -21333,7 +22213,7 @@
             </a:r>
             <a:r>
               <a:rPr lang="en-GB" sz="2400" dirty="0" err="1"/>
-              <a:t>SpecvP</a:t>
+              <a:t>SpecnP</a:t>
             </a:r>
             <a:r>
               <a:rPr lang="en-GB" sz="2400" dirty="0"/>
@@ -21756,6 +22636,852 @@
           </a:p>
         </p:txBody>
       </p:sp>
+      <p:cxnSp>
+        <p:nvCxnSpPr>
+          <p:cNvPr id="12" name="Straight Connector 11">
+            <a:extLst>
+              <a:ext uri="{FF2B5EF4-FFF2-40B4-BE49-F238E27FC236}">
+                <a16:creationId xmlns:a16="http://schemas.microsoft.com/office/drawing/2014/main" id="{20850C04-5E16-28CC-0427-3BD9F65B9941}"/>
+              </a:ext>
+            </a:extLst>
+          </p:cNvPr>
+          <p:cNvCxnSpPr/>
+          <p:nvPr/>
+        </p:nvCxnSpPr>
+        <p:spPr>
+          <a:xfrm flipH="1">
+            <a:off x="581891" y="1446415"/>
+            <a:ext cx="598516" cy="212728"/>
+          </a:xfrm>
+          <a:prstGeom prst="line">
+            <a:avLst/>
+          </a:prstGeom>
+        </p:spPr>
+        <p:style>
+          <a:lnRef idx="1">
+            <a:schemeClr val="dk1"/>
+          </a:lnRef>
+          <a:fillRef idx="0">
+            <a:schemeClr val="dk1"/>
+          </a:fillRef>
+          <a:effectRef idx="0">
+            <a:schemeClr val="dk1"/>
+          </a:effectRef>
+          <a:fontRef idx="minor">
+            <a:schemeClr val="tx1"/>
+          </a:fontRef>
+        </p:style>
+      </p:cxnSp>
+      <p:cxnSp>
+        <p:nvCxnSpPr>
+          <p:cNvPr id="14" name="Straight Connector 13">
+            <a:extLst>
+              <a:ext uri="{FF2B5EF4-FFF2-40B4-BE49-F238E27FC236}">
+                <a16:creationId xmlns:a16="http://schemas.microsoft.com/office/drawing/2014/main" id="{7A497350-674D-11AA-C8D4-551204080EF7}"/>
+              </a:ext>
+            </a:extLst>
+          </p:cNvPr>
+          <p:cNvCxnSpPr>
+            <a:cxnSpLocks/>
+          </p:cNvCxnSpPr>
+          <p:nvPr/>
+        </p:nvCxnSpPr>
+        <p:spPr>
+          <a:xfrm>
+            <a:off x="1180407" y="1446415"/>
+            <a:ext cx="798022" cy="212728"/>
+          </a:xfrm>
+          <a:prstGeom prst="line">
+            <a:avLst/>
+          </a:prstGeom>
+        </p:spPr>
+        <p:style>
+          <a:lnRef idx="1">
+            <a:schemeClr val="dk1"/>
+          </a:lnRef>
+          <a:fillRef idx="0">
+            <a:schemeClr val="dk1"/>
+          </a:fillRef>
+          <a:effectRef idx="0">
+            <a:schemeClr val="dk1"/>
+          </a:effectRef>
+          <a:fontRef idx="minor">
+            <a:schemeClr val="tx1"/>
+          </a:fontRef>
+        </p:style>
+      </p:cxnSp>
+      <p:cxnSp>
+        <p:nvCxnSpPr>
+          <p:cNvPr id="17" name="Straight Connector 16">
+            <a:extLst>
+              <a:ext uri="{FF2B5EF4-FFF2-40B4-BE49-F238E27FC236}">
+                <a16:creationId xmlns:a16="http://schemas.microsoft.com/office/drawing/2014/main" id="{7E76384D-AEA1-1164-305D-C07823FF352F}"/>
+              </a:ext>
+            </a:extLst>
+          </p:cNvPr>
+          <p:cNvCxnSpPr/>
+          <p:nvPr/>
+        </p:nvCxnSpPr>
+        <p:spPr>
+          <a:xfrm flipH="1">
+            <a:off x="1180407" y="1878676"/>
+            <a:ext cx="798022" cy="182880"/>
+          </a:xfrm>
+          <a:prstGeom prst="line">
+            <a:avLst/>
+          </a:prstGeom>
+        </p:spPr>
+        <p:style>
+          <a:lnRef idx="1">
+            <a:schemeClr val="dk1"/>
+          </a:lnRef>
+          <a:fillRef idx="0">
+            <a:schemeClr val="dk1"/>
+          </a:fillRef>
+          <a:effectRef idx="0">
+            <a:schemeClr val="dk1"/>
+          </a:effectRef>
+          <a:fontRef idx="minor">
+            <a:schemeClr val="tx1"/>
+          </a:fontRef>
+        </p:style>
+      </p:cxnSp>
+      <p:cxnSp>
+        <p:nvCxnSpPr>
+          <p:cNvPr id="19" name="Straight Connector 18">
+            <a:extLst>
+              <a:ext uri="{FF2B5EF4-FFF2-40B4-BE49-F238E27FC236}">
+                <a16:creationId xmlns:a16="http://schemas.microsoft.com/office/drawing/2014/main" id="{E2636484-413B-AAFF-E30A-9BF4E52079E5}"/>
+              </a:ext>
+            </a:extLst>
+          </p:cNvPr>
+          <p:cNvCxnSpPr/>
+          <p:nvPr/>
+        </p:nvCxnSpPr>
+        <p:spPr>
+          <a:xfrm>
+            <a:off x="1978429" y="1878676"/>
+            <a:ext cx="1047404" cy="199506"/>
+          </a:xfrm>
+          <a:prstGeom prst="line">
+            <a:avLst/>
+          </a:prstGeom>
+        </p:spPr>
+        <p:style>
+          <a:lnRef idx="1">
+            <a:schemeClr val="dk1"/>
+          </a:lnRef>
+          <a:fillRef idx="0">
+            <a:schemeClr val="dk1"/>
+          </a:fillRef>
+          <a:effectRef idx="0">
+            <a:schemeClr val="dk1"/>
+          </a:effectRef>
+          <a:fontRef idx="minor">
+            <a:schemeClr val="tx1"/>
+          </a:fontRef>
+        </p:style>
+      </p:cxnSp>
+      <p:cxnSp>
+        <p:nvCxnSpPr>
+          <p:cNvPr id="21" name="Straight Connector 20">
+            <a:extLst>
+              <a:ext uri="{FF2B5EF4-FFF2-40B4-BE49-F238E27FC236}">
+                <a16:creationId xmlns:a16="http://schemas.microsoft.com/office/drawing/2014/main" id="{C32C46EB-3AD5-00B9-64BF-9C7C2B06A903}"/>
+              </a:ext>
+            </a:extLst>
+          </p:cNvPr>
+          <p:cNvCxnSpPr/>
+          <p:nvPr/>
+        </p:nvCxnSpPr>
+        <p:spPr>
+          <a:xfrm flipH="1">
+            <a:off x="2377440" y="2310938"/>
+            <a:ext cx="598516" cy="179202"/>
+          </a:xfrm>
+          <a:prstGeom prst="line">
+            <a:avLst/>
+          </a:prstGeom>
+        </p:spPr>
+        <p:style>
+          <a:lnRef idx="1">
+            <a:schemeClr val="dk1"/>
+          </a:lnRef>
+          <a:fillRef idx="0">
+            <a:schemeClr val="dk1"/>
+          </a:fillRef>
+          <a:effectRef idx="0">
+            <a:schemeClr val="dk1"/>
+          </a:effectRef>
+          <a:fontRef idx="minor">
+            <a:schemeClr val="tx1"/>
+          </a:fontRef>
+        </p:style>
+      </p:cxnSp>
+      <p:cxnSp>
+        <p:nvCxnSpPr>
+          <p:cNvPr id="23" name="Straight Connector 22">
+            <a:extLst>
+              <a:ext uri="{FF2B5EF4-FFF2-40B4-BE49-F238E27FC236}">
+                <a16:creationId xmlns:a16="http://schemas.microsoft.com/office/drawing/2014/main" id="{5F265AFB-4393-EE6B-83F3-A610DD54FBCC}"/>
+              </a:ext>
+            </a:extLst>
+          </p:cNvPr>
+          <p:cNvCxnSpPr>
+            <a:cxnSpLocks/>
+          </p:cNvCxnSpPr>
+          <p:nvPr/>
+        </p:nvCxnSpPr>
+        <p:spPr>
+          <a:xfrm>
+            <a:off x="2975956" y="2310938"/>
+            <a:ext cx="846213" cy="179202"/>
+          </a:xfrm>
+          <a:prstGeom prst="line">
+            <a:avLst/>
+          </a:prstGeom>
+        </p:spPr>
+        <p:style>
+          <a:lnRef idx="1">
+            <a:schemeClr val="dk1"/>
+          </a:lnRef>
+          <a:fillRef idx="0">
+            <a:schemeClr val="dk1"/>
+          </a:fillRef>
+          <a:effectRef idx="0">
+            <a:schemeClr val="dk1"/>
+          </a:effectRef>
+          <a:fontRef idx="minor">
+            <a:schemeClr val="tx1"/>
+          </a:fontRef>
+        </p:style>
+      </p:cxnSp>
+      <p:cxnSp>
+        <p:nvCxnSpPr>
+          <p:cNvPr id="25" name="Straight Connector 24">
+            <a:extLst>
+              <a:ext uri="{FF2B5EF4-FFF2-40B4-BE49-F238E27FC236}">
+                <a16:creationId xmlns:a16="http://schemas.microsoft.com/office/drawing/2014/main" id="{E4C01D0A-0575-4537-C74D-BBE55190F9C6}"/>
+              </a:ext>
+            </a:extLst>
+          </p:cNvPr>
+          <p:cNvCxnSpPr/>
+          <p:nvPr/>
+        </p:nvCxnSpPr>
+        <p:spPr>
+          <a:xfrm flipH="1">
+            <a:off x="3275215" y="2743200"/>
+            <a:ext cx="546954" cy="182880"/>
+          </a:xfrm>
+          <a:prstGeom prst="line">
+            <a:avLst/>
+          </a:prstGeom>
+        </p:spPr>
+        <p:style>
+          <a:lnRef idx="1">
+            <a:schemeClr val="dk1"/>
+          </a:lnRef>
+          <a:fillRef idx="0">
+            <a:schemeClr val="dk1"/>
+          </a:fillRef>
+          <a:effectRef idx="0">
+            <a:schemeClr val="dk1"/>
+          </a:effectRef>
+          <a:fontRef idx="minor">
+            <a:schemeClr val="tx1"/>
+          </a:fontRef>
+        </p:style>
+      </p:cxnSp>
+      <p:cxnSp>
+        <p:nvCxnSpPr>
+          <p:cNvPr id="27" name="Straight Connector 26">
+            <a:extLst>
+              <a:ext uri="{FF2B5EF4-FFF2-40B4-BE49-F238E27FC236}">
+                <a16:creationId xmlns:a16="http://schemas.microsoft.com/office/drawing/2014/main" id="{F2FFFCD4-6239-6A33-AAD7-DE3EC57E2019}"/>
+              </a:ext>
+            </a:extLst>
+          </p:cNvPr>
+          <p:cNvCxnSpPr/>
+          <p:nvPr/>
+        </p:nvCxnSpPr>
+        <p:spPr>
+          <a:xfrm>
+            <a:off x="3822169" y="2743200"/>
+            <a:ext cx="1044046" cy="166255"/>
+          </a:xfrm>
+          <a:prstGeom prst="line">
+            <a:avLst/>
+          </a:prstGeom>
+        </p:spPr>
+        <p:style>
+          <a:lnRef idx="1">
+            <a:schemeClr val="dk1"/>
+          </a:lnRef>
+          <a:fillRef idx="0">
+            <a:schemeClr val="dk1"/>
+          </a:fillRef>
+          <a:effectRef idx="0">
+            <a:schemeClr val="dk1"/>
+          </a:effectRef>
+          <a:fontRef idx="minor">
+            <a:schemeClr val="tx1"/>
+          </a:fontRef>
+        </p:style>
+      </p:cxnSp>
+      <p:cxnSp>
+        <p:nvCxnSpPr>
+          <p:cNvPr id="29" name="Straight Connector 28">
+            <a:extLst>
+              <a:ext uri="{FF2B5EF4-FFF2-40B4-BE49-F238E27FC236}">
+                <a16:creationId xmlns:a16="http://schemas.microsoft.com/office/drawing/2014/main" id="{BBBC022B-E1B1-ABA9-DB31-E3249C391C5C}"/>
+              </a:ext>
+            </a:extLst>
+          </p:cNvPr>
+          <p:cNvCxnSpPr>
+            <a:cxnSpLocks/>
+          </p:cNvCxnSpPr>
+          <p:nvPr/>
+        </p:nvCxnSpPr>
+        <p:spPr>
+          <a:xfrm flipH="1">
+            <a:off x="4239491" y="3190669"/>
+            <a:ext cx="626724" cy="117796"/>
+          </a:xfrm>
+          <a:prstGeom prst="line">
+            <a:avLst/>
+          </a:prstGeom>
+        </p:spPr>
+        <p:style>
+          <a:lnRef idx="1">
+            <a:schemeClr val="dk1"/>
+          </a:lnRef>
+          <a:fillRef idx="0">
+            <a:schemeClr val="dk1"/>
+          </a:fillRef>
+          <a:effectRef idx="0">
+            <a:schemeClr val="dk1"/>
+          </a:effectRef>
+          <a:fontRef idx="minor">
+            <a:schemeClr val="tx1"/>
+          </a:fontRef>
+        </p:style>
+      </p:cxnSp>
+      <p:cxnSp>
+        <p:nvCxnSpPr>
+          <p:cNvPr id="31" name="Straight Connector 30">
+            <a:extLst>
+              <a:ext uri="{FF2B5EF4-FFF2-40B4-BE49-F238E27FC236}">
+                <a16:creationId xmlns:a16="http://schemas.microsoft.com/office/drawing/2014/main" id="{AE346363-368A-98A8-E18D-37239D17F373}"/>
+              </a:ext>
+            </a:extLst>
+          </p:cNvPr>
+          <p:cNvCxnSpPr>
+            <a:cxnSpLocks/>
+          </p:cNvCxnSpPr>
+          <p:nvPr/>
+        </p:nvCxnSpPr>
+        <p:spPr>
+          <a:xfrm>
+            <a:off x="4866215" y="3190669"/>
+            <a:ext cx="701146" cy="117796"/>
+          </a:xfrm>
+          <a:prstGeom prst="line">
+            <a:avLst/>
+          </a:prstGeom>
+        </p:spPr>
+        <p:style>
+          <a:lnRef idx="1">
+            <a:schemeClr val="dk1"/>
+          </a:lnRef>
+          <a:fillRef idx="0">
+            <a:schemeClr val="dk1"/>
+          </a:fillRef>
+          <a:effectRef idx="0">
+            <a:schemeClr val="dk1"/>
+          </a:effectRef>
+          <a:fontRef idx="minor">
+            <a:schemeClr val="tx1"/>
+          </a:fontRef>
+        </p:style>
+      </p:cxnSp>
+      <p:cxnSp>
+        <p:nvCxnSpPr>
+          <p:cNvPr id="34" name="Straight Connector 33">
+            <a:extLst>
+              <a:ext uri="{FF2B5EF4-FFF2-40B4-BE49-F238E27FC236}">
+                <a16:creationId xmlns:a16="http://schemas.microsoft.com/office/drawing/2014/main" id="{02A5AC62-B6A6-6DBD-4103-A055714E63BF}"/>
+              </a:ext>
+            </a:extLst>
+          </p:cNvPr>
+          <p:cNvCxnSpPr/>
+          <p:nvPr/>
+        </p:nvCxnSpPr>
+        <p:spPr>
+          <a:xfrm flipH="1">
+            <a:off x="4866215" y="3557847"/>
+            <a:ext cx="701146" cy="182880"/>
+          </a:xfrm>
+          <a:prstGeom prst="line">
+            <a:avLst/>
+          </a:prstGeom>
+        </p:spPr>
+        <p:style>
+          <a:lnRef idx="1">
+            <a:schemeClr val="dk1"/>
+          </a:lnRef>
+          <a:fillRef idx="0">
+            <a:schemeClr val="dk1"/>
+          </a:fillRef>
+          <a:effectRef idx="0">
+            <a:schemeClr val="dk1"/>
+          </a:effectRef>
+          <a:fontRef idx="minor">
+            <a:schemeClr val="tx1"/>
+          </a:fontRef>
+        </p:style>
+      </p:cxnSp>
+      <p:cxnSp>
+        <p:nvCxnSpPr>
+          <p:cNvPr id="36" name="Straight Connector 35">
+            <a:extLst>
+              <a:ext uri="{FF2B5EF4-FFF2-40B4-BE49-F238E27FC236}">
+                <a16:creationId xmlns:a16="http://schemas.microsoft.com/office/drawing/2014/main" id="{63754E31-2769-C2E9-D30A-265456F06C4C}"/>
+              </a:ext>
+            </a:extLst>
+          </p:cNvPr>
+          <p:cNvCxnSpPr/>
+          <p:nvPr/>
+        </p:nvCxnSpPr>
+        <p:spPr>
+          <a:xfrm>
+            <a:off x="5567361" y="3549536"/>
+            <a:ext cx="1215824" cy="207817"/>
+          </a:xfrm>
+          <a:prstGeom prst="line">
+            <a:avLst/>
+          </a:prstGeom>
+        </p:spPr>
+        <p:style>
+          <a:lnRef idx="1">
+            <a:schemeClr val="dk1"/>
+          </a:lnRef>
+          <a:fillRef idx="0">
+            <a:schemeClr val="dk1"/>
+          </a:fillRef>
+          <a:effectRef idx="0">
+            <a:schemeClr val="dk1"/>
+          </a:effectRef>
+          <a:fontRef idx="minor">
+            <a:schemeClr val="tx1"/>
+          </a:fontRef>
+        </p:style>
+      </p:cxnSp>
+      <p:cxnSp>
+        <p:nvCxnSpPr>
+          <p:cNvPr id="38" name="Straight Connector 37">
+            <a:extLst>
+              <a:ext uri="{FF2B5EF4-FFF2-40B4-BE49-F238E27FC236}">
+                <a16:creationId xmlns:a16="http://schemas.microsoft.com/office/drawing/2014/main" id="{B7A7B546-39D9-41F8-C24B-3F8B6B69A683}"/>
+              </a:ext>
+            </a:extLst>
+          </p:cNvPr>
+          <p:cNvCxnSpPr>
+            <a:cxnSpLocks/>
+          </p:cNvCxnSpPr>
+          <p:nvPr/>
+        </p:nvCxnSpPr>
+        <p:spPr>
+          <a:xfrm flipH="1">
+            <a:off x="6096000" y="4021666"/>
+            <a:ext cx="687185" cy="184574"/>
+          </a:xfrm>
+          <a:prstGeom prst="line">
+            <a:avLst/>
+          </a:prstGeom>
+        </p:spPr>
+        <p:style>
+          <a:lnRef idx="1">
+            <a:schemeClr val="dk1"/>
+          </a:lnRef>
+          <a:fillRef idx="0">
+            <a:schemeClr val="dk1"/>
+          </a:fillRef>
+          <a:effectRef idx="0">
+            <a:schemeClr val="dk1"/>
+          </a:effectRef>
+          <a:fontRef idx="minor">
+            <a:schemeClr val="tx1"/>
+          </a:fontRef>
+        </p:style>
+      </p:cxnSp>
+      <p:cxnSp>
+        <p:nvCxnSpPr>
+          <p:cNvPr id="42" name="Straight Connector 41">
+            <a:extLst>
+              <a:ext uri="{FF2B5EF4-FFF2-40B4-BE49-F238E27FC236}">
+                <a16:creationId xmlns:a16="http://schemas.microsoft.com/office/drawing/2014/main" id="{6E829E9C-0283-5194-31A1-2FC95C41551F}"/>
+              </a:ext>
+            </a:extLst>
+          </p:cNvPr>
+          <p:cNvCxnSpPr/>
+          <p:nvPr/>
+        </p:nvCxnSpPr>
+        <p:spPr>
+          <a:xfrm>
+            <a:off x="6783185" y="4021666"/>
+            <a:ext cx="881150" cy="134698"/>
+          </a:xfrm>
+          <a:prstGeom prst="line">
+            <a:avLst/>
+          </a:prstGeom>
+        </p:spPr>
+        <p:style>
+          <a:lnRef idx="1">
+            <a:schemeClr val="dk1"/>
+          </a:lnRef>
+          <a:fillRef idx="0">
+            <a:schemeClr val="dk1"/>
+          </a:fillRef>
+          <a:effectRef idx="0">
+            <a:schemeClr val="dk1"/>
+          </a:effectRef>
+          <a:fontRef idx="minor">
+            <a:schemeClr val="tx1"/>
+          </a:fontRef>
+        </p:style>
+      </p:cxnSp>
+      <p:cxnSp>
+        <p:nvCxnSpPr>
+          <p:cNvPr id="44" name="Straight Connector 43">
+            <a:extLst>
+              <a:ext uri="{FF2B5EF4-FFF2-40B4-BE49-F238E27FC236}">
+                <a16:creationId xmlns:a16="http://schemas.microsoft.com/office/drawing/2014/main" id="{157E6B70-AC74-8AB2-7E2A-61AA4214CE30}"/>
+              </a:ext>
+            </a:extLst>
+          </p:cNvPr>
+          <p:cNvCxnSpPr>
+            <a:cxnSpLocks/>
+          </p:cNvCxnSpPr>
+          <p:nvPr/>
+        </p:nvCxnSpPr>
+        <p:spPr>
+          <a:xfrm flipH="1">
+            <a:off x="6783185" y="4472247"/>
+            <a:ext cx="881150" cy="116378"/>
+          </a:xfrm>
+          <a:prstGeom prst="line">
+            <a:avLst/>
+          </a:prstGeom>
+        </p:spPr>
+        <p:style>
+          <a:lnRef idx="1">
+            <a:schemeClr val="dk1"/>
+          </a:lnRef>
+          <a:fillRef idx="0">
+            <a:schemeClr val="dk1"/>
+          </a:fillRef>
+          <a:effectRef idx="0">
+            <a:schemeClr val="dk1"/>
+          </a:effectRef>
+          <a:fontRef idx="minor">
+            <a:schemeClr val="tx1"/>
+          </a:fontRef>
+        </p:style>
+      </p:cxnSp>
+      <p:cxnSp>
+        <p:nvCxnSpPr>
+          <p:cNvPr id="46" name="Straight Connector 45">
+            <a:extLst>
+              <a:ext uri="{FF2B5EF4-FFF2-40B4-BE49-F238E27FC236}">
+                <a16:creationId xmlns:a16="http://schemas.microsoft.com/office/drawing/2014/main" id="{06B58BB7-1A76-5300-948B-707108754A74}"/>
+              </a:ext>
+            </a:extLst>
+          </p:cNvPr>
+          <p:cNvCxnSpPr>
+            <a:cxnSpLocks/>
+          </p:cNvCxnSpPr>
+          <p:nvPr/>
+        </p:nvCxnSpPr>
+        <p:spPr>
+          <a:xfrm>
+            <a:off x="7664335" y="4472247"/>
+            <a:ext cx="764770" cy="116378"/>
+          </a:xfrm>
+          <a:prstGeom prst="line">
+            <a:avLst/>
+          </a:prstGeom>
+        </p:spPr>
+        <p:style>
+          <a:lnRef idx="1">
+            <a:schemeClr val="dk1"/>
+          </a:lnRef>
+          <a:fillRef idx="0">
+            <a:schemeClr val="dk1"/>
+          </a:fillRef>
+          <a:effectRef idx="0">
+            <a:schemeClr val="dk1"/>
+          </a:effectRef>
+          <a:fontRef idx="minor">
+            <a:schemeClr val="tx1"/>
+          </a:fontRef>
+        </p:style>
+      </p:cxnSp>
+      <p:cxnSp>
+        <p:nvCxnSpPr>
+          <p:cNvPr id="49" name="Straight Connector 48">
+            <a:extLst>
+              <a:ext uri="{FF2B5EF4-FFF2-40B4-BE49-F238E27FC236}">
+                <a16:creationId xmlns:a16="http://schemas.microsoft.com/office/drawing/2014/main" id="{F10A1780-0E26-952E-5806-0EB6791A5F90}"/>
+              </a:ext>
+            </a:extLst>
+          </p:cNvPr>
+          <p:cNvCxnSpPr>
+            <a:cxnSpLocks/>
+          </p:cNvCxnSpPr>
+          <p:nvPr/>
+        </p:nvCxnSpPr>
+        <p:spPr>
+          <a:xfrm flipH="1">
+            <a:off x="7916332" y="4898854"/>
+            <a:ext cx="512773" cy="122033"/>
+          </a:xfrm>
+          <a:prstGeom prst="line">
+            <a:avLst/>
+          </a:prstGeom>
+        </p:spPr>
+        <p:style>
+          <a:lnRef idx="1">
+            <a:schemeClr val="dk1"/>
+          </a:lnRef>
+          <a:fillRef idx="0">
+            <a:schemeClr val="dk1"/>
+          </a:fillRef>
+          <a:effectRef idx="0">
+            <a:schemeClr val="dk1"/>
+          </a:effectRef>
+          <a:fontRef idx="minor">
+            <a:schemeClr val="tx1"/>
+          </a:fontRef>
+        </p:style>
+      </p:cxnSp>
+      <p:cxnSp>
+        <p:nvCxnSpPr>
+          <p:cNvPr id="52" name="Straight Connector 51">
+            <a:extLst>
+              <a:ext uri="{FF2B5EF4-FFF2-40B4-BE49-F238E27FC236}">
+                <a16:creationId xmlns:a16="http://schemas.microsoft.com/office/drawing/2014/main" id="{AF6A7198-90F5-0142-C7FC-04D46229F61C}"/>
+              </a:ext>
+            </a:extLst>
+          </p:cNvPr>
+          <p:cNvCxnSpPr/>
+          <p:nvPr/>
+        </p:nvCxnSpPr>
+        <p:spPr>
+          <a:xfrm>
+            <a:off x="8429105" y="4898854"/>
+            <a:ext cx="881150" cy="155284"/>
+          </a:xfrm>
+          <a:prstGeom prst="line">
+            <a:avLst/>
+          </a:prstGeom>
+        </p:spPr>
+        <p:style>
+          <a:lnRef idx="1">
+            <a:schemeClr val="dk1"/>
+          </a:lnRef>
+          <a:fillRef idx="0">
+            <a:schemeClr val="dk1"/>
+          </a:fillRef>
+          <a:effectRef idx="0">
+            <a:schemeClr val="dk1"/>
+          </a:effectRef>
+          <a:fontRef idx="minor">
+            <a:schemeClr val="tx1"/>
+          </a:fontRef>
+        </p:style>
+      </p:cxnSp>
+      <p:cxnSp>
+        <p:nvCxnSpPr>
+          <p:cNvPr id="54" name="Straight Connector 53">
+            <a:extLst>
+              <a:ext uri="{FF2B5EF4-FFF2-40B4-BE49-F238E27FC236}">
+                <a16:creationId xmlns:a16="http://schemas.microsoft.com/office/drawing/2014/main" id="{199995F2-8235-BDC6-5357-74E88DA397E4}"/>
+              </a:ext>
+            </a:extLst>
+          </p:cNvPr>
+          <p:cNvCxnSpPr/>
+          <p:nvPr/>
+        </p:nvCxnSpPr>
+        <p:spPr>
+          <a:xfrm flipH="1">
+            <a:off x="8429105" y="5198857"/>
+            <a:ext cx="881150" cy="105443"/>
+          </a:xfrm>
+          <a:prstGeom prst="line">
+            <a:avLst/>
+          </a:prstGeom>
+        </p:spPr>
+        <p:style>
+          <a:lnRef idx="1">
+            <a:schemeClr val="dk1"/>
+          </a:lnRef>
+          <a:fillRef idx="0">
+            <a:schemeClr val="dk1"/>
+          </a:fillRef>
+          <a:effectRef idx="0">
+            <a:schemeClr val="dk1"/>
+          </a:effectRef>
+          <a:fontRef idx="minor">
+            <a:schemeClr val="tx1"/>
+          </a:fontRef>
+        </p:style>
+      </p:cxnSp>
+      <p:cxnSp>
+        <p:nvCxnSpPr>
+          <p:cNvPr id="13" name="Straight Connector 12">
+            <a:extLst>
+              <a:ext uri="{FF2B5EF4-FFF2-40B4-BE49-F238E27FC236}">
+                <a16:creationId xmlns:a16="http://schemas.microsoft.com/office/drawing/2014/main" id="{9A26ECD1-A9E7-A391-2DD8-1C05C7D23196}"/>
+              </a:ext>
+            </a:extLst>
+          </p:cNvPr>
+          <p:cNvCxnSpPr/>
+          <p:nvPr/>
+        </p:nvCxnSpPr>
+        <p:spPr>
+          <a:xfrm>
+            <a:off x="9310255" y="5181762"/>
+            <a:ext cx="964276" cy="122538"/>
+          </a:xfrm>
+          <a:prstGeom prst="line">
+            <a:avLst/>
+          </a:prstGeom>
+        </p:spPr>
+        <p:style>
+          <a:lnRef idx="1">
+            <a:schemeClr val="dk1"/>
+          </a:lnRef>
+          <a:fillRef idx="0">
+            <a:schemeClr val="dk1"/>
+          </a:fillRef>
+          <a:effectRef idx="0">
+            <a:schemeClr val="dk1"/>
+          </a:effectRef>
+          <a:fontRef idx="minor">
+            <a:schemeClr val="tx1"/>
+          </a:fontRef>
+        </p:style>
+      </p:cxnSp>
+      <p:cxnSp>
+        <p:nvCxnSpPr>
+          <p:cNvPr id="16" name="Straight Connector 15">
+            <a:extLst>
+              <a:ext uri="{FF2B5EF4-FFF2-40B4-BE49-F238E27FC236}">
+                <a16:creationId xmlns:a16="http://schemas.microsoft.com/office/drawing/2014/main" id="{319D0977-F084-BAF1-1853-9791B63E8892}"/>
+              </a:ext>
+            </a:extLst>
+          </p:cNvPr>
+          <p:cNvCxnSpPr>
+            <a:cxnSpLocks/>
+          </p:cNvCxnSpPr>
+          <p:nvPr/>
+        </p:nvCxnSpPr>
+        <p:spPr>
+          <a:xfrm flipH="1">
+            <a:off x="9692640" y="5577902"/>
+            <a:ext cx="581891" cy="94765"/>
+          </a:xfrm>
+          <a:prstGeom prst="line">
+            <a:avLst/>
+          </a:prstGeom>
+        </p:spPr>
+        <p:style>
+          <a:lnRef idx="1">
+            <a:schemeClr val="dk1"/>
+          </a:lnRef>
+          <a:fillRef idx="0">
+            <a:schemeClr val="dk1"/>
+          </a:fillRef>
+          <a:effectRef idx="0">
+            <a:schemeClr val="dk1"/>
+          </a:effectRef>
+          <a:fontRef idx="minor">
+            <a:schemeClr val="tx1"/>
+          </a:fontRef>
+        </p:style>
+      </p:cxnSp>
+      <p:cxnSp>
+        <p:nvCxnSpPr>
+          <p:cNvPr id="24" name="Straight Connector 23">
+            <a:extLst>
+              <a:ext uri="{FF2B5EF4-FFF2-40B4-BE49-F238E27FC236}">
+                <a16:creationId xmlns:a16="http://schemas.microsoft.com/office/drawing/2014/main" id="{680F255C-9378-2545-41C2-70E323958361}"/>
+              </a:ext>
+            </a:extLst>
+          </p:cNvPr>
+          <p:cNvCxnSpPr/>
+          <p:nvPr/>
+        </p:nvCxnSpPr>
+        <p:spPr>
+          <a:xfrm>
+            <a:off x="10274531" y="5577902"/>
+            <a:ext cx="864524" cy="94765"/>
+          </a:xfrm>
+          <a:prstGeom prst="line">
+            <a:avLst/>
+          </a:prstGeom>
+        </p:spPr>
+        <p:style>
+          <a:lnRef idx="1">
+            <a:schemeClr val="dk1"/>
+          </a:lnRef>
+          <a:fillRef idx="0">
+            <a:schemeClr val="dk1"/>
+          </a:fillRef>
+          <a:effectRef idx="0">
+            <a:schemeClr val="dk1"/>
+          </a:effectRef>
+          <a:fontRef idx="minor">
+            <a:schemeClr val="tx1"/>
+          </a:fontRef>
+        </p:style>
+      </p:cxnSp>
+      <p:cxnSp>
+        <p:nvCxnSpPr>
+          <p:cNvPr id="28" name="Straight Connector 27">
+            <a:extLst>
+              <a:ext uri="{FF2B5EF4-FFF2-40B4-BE49-F238E27FC236}">
+                <a16:creationId xmlns:a16="http://schemas.microsoft.com/office/drawing/2014/main" id="{DC9C8E30-5D47-2BD2-4A6D-A4510622E441}"/>
+              </a:ext>
+            </a:extLst>
+          </p:cNvPr>
+          <p:cNvCxnSpPr/>
+          <p:nvPr/>
+        </p:nvCxnSpPr>
+        <p:spPr>
+          <a:xfrm>
+            <a:off x="11155680" y="5945686"/>
+            <a:ext cx="0" cy="210107"/>
+          </a:xfrm>
+          <a:prstGeom prst="line">
+            <a:avLst/>
+          </a:prstGeom>
+        </p:spPr>
+        <p:style>
+          <a:lnRef idx="1">
+            <a:schemeClr val="dk1"/>
+          </a:lnRef>
+          <a:fillRef idx="0">
+            <a:schemeClr val="dk1"/>
+          </a:fillRef>
+          <a:effectRef idx="0">
+            <a:schemeClr val="dk1"/>
+          </a:effectRef>
+          <a:fontRef idx="minor">
+            <a:schemeClr val="tx1"/>
+          </a:fontRef>
+        </p:style>
+      </p:cxnSp>
     </p:spTree>
     <p:extLst>
       <p:ext uri="{BB962C8B-B14F-4D97-AF65-F5344CB8AC3E}">
